--- a/public/materialy/1L/6/Prezentace k hodinám/2. Rozlišení, barvy a barevná hloubka.pptx
+++ b/public/materialy/1L/6/Prezentace k hodinám/2. Rozlišení, barvy a barevná hloubka.pptx
@@ -513,7 +513,7 @@
           </a:p>
           <a:p>
             <a:r>
-              <a:t>Soubory: 01. Laboratoř grafiky.html (modul 04), obrazky/hloubka_*.png</a:t>
+              <a:t>Soubory: 01. Laboratoř grafiky.html (modul 04), Obrázky/hloubka_*.png</a:t>
             </a:r>
           </a:p>
           <a:p>
@@ -758,7 +758,7 @@
           </a:p>
           <a:p>
             <a:r>
-              <a:t>Soubory: 01. Laboratoř grafiky.html (modul 04), obrazky/hloubka_*.png</a:t>
+              <a:t>Soubory: 01. Laboratoř grafiky.html (modul 04), Obrázky/hloubka_*.png</a:t>
             </a:r>
           </a:p>
           <a:p>
@@ -6036,7 +6036,7 @@
                 </a:solidFill>
                 <a:latin typeface="Calibri"/>
               </a:rPr>
-              <a:t>01. Laboratoř grafiky.html (modul 04), obrazky/hloubka_*.png</a:t>
+              <a:t>01. Laboratoř grafiky.html (modul 04), Obrázky/hloubka_*.png</a:t>
             </a:r>
           </a:p>
         </p:txBody>

--- a/public/materialy/1L/6/Prezentace k hodinám/2. Rozlišení, barvy a barevná hloubka.pptx
+++ b/public/materialy/1L/6/Prezentace k hodinám/2. Rozlišení, barvy a barevná hloubka.pptx
@@ -508,17 +508,61 @@
           <a:lstStyle/>
           <a:p>
             <a:r>
-              <a:t>Cíl hodiny: Student vysvětlí, co určuje rozlišení a barevná hloubka, a odhadne, jaké nastavení stačí pro daný účel.</a:t>
-            </a:r>
-          </a:p>
-          <a:p>
-            <a:r>
-              <a:t>Soubory: Laboratoř – barevná hloubka.html, Obrázky/hloubka_*.png</a:t>
-            </a:r>
-          </a:p>
-          <a:p>
-            <a:r>
-              <a:t>Výstup: Tabulka čtyř barevných hloubek s pozorováním a tři návrhy nastavení se zdůvodněním.</a:t>
+              <a:t>NEŽ ZAZVONÍ</a:t>
+            </a:r>
+          </a:p>
+          <a:p>
+            <a:r>
+              <a:t>Otevři Laboratoř – barevná hloubka.html na projektoru a měj nalistovaný modul 04.</a:t>
+            </a:r>
+          </a:p>
+          <a:p>
+            <a:r>
+              <a:t>Rozbal Obrázky.zip. Čtyři soubory hloubka_1bit až hloubka_24bit musí mít každý student u sebe — na plátně se pásy v obloze často nepoznají a studenti se musí dívat na svůj monitor.</a:t>
+            </a:r>
+          </a:p>
+          <a:p/>
+          <a:p>
+            <a:r>
+              <a:t>NAVAZUJE NA</a:t>
+            </a:r>
+          </a:p>
+          <a:p>
+            <a:r>
+              <a:t>Hodinu 1: rastr má pevný počet pixelů. Dnes se ptáme, kolik jich stačí a kolik barev k tomu.</a:t>
+            </a:r>
+          </a:p>
+          <a:p/>
+          <a:p>
+            <a:r>
+              <a:t>CÍL HODINY</a:t>
+            </a:r>
+          </a:p>
+          <a:p>
+            <a:r>
+              <a:t>Student vysvětlí, co určuje rozlišení a barevná hloubka, a odhadne, jaké nastavení stačí pro daný účel.</a:t>
+            </a:r>
+          </a:p>
+          <a:p/>
+          <a:p>
+            <a:r>
+              <a:t>VÝSTUP, KTERÝ VYBÍRÁŠ</a:t>
+            </a:r>
+          </a:p>
+          <a:p>
+            <a:r>
+              <a:t>Tabulka čtyř barevných hloubek s pozorováním a tři návrhy nastavení se zdůvodněním.</a:t>
+            </a:r>
+          </a:p>
+          <a:p/>
+          <a:p>
+            <a:r>
+              <a:t>ROZVRŽENÍ</a:t>
+            </a:r>
+          </a:p>
+          <a:p>
+            <a:r>
+              <a:t>5 min odhad · 7 min výklad · 28 min práce · 5 min rozbor a exit ticket.</a:t>
             </a:r>
           </a:p>
         </p:txBody>
@@ -591,14 +635,47 @@
               <a:t>Čas: 0–5 minut.</a:t>
             </a:r>
           </a:p>
-          <a:p>
-            <a:r>
-              <a:t>Otázka pro studenty: Fotku 6 000 × 4 000 px máš poslat e‑mailem. Co s ní uděláš, aby prošla a přitom byla použitelná?</a:t>
-            </a:r>
-          </a:p>
-          <a:p>
-            <a:r>
-              <a:t>Postup: nech studenty rozhodnout a zapsat důvod dřív, než ukážeš řešení. Neprozrazuj správnou odpověď.</a:t>
+          <a:p/>
+          <a:p>
+            <a:r>
+              <a:t>CO ŘEKNEŠ</a:t>
+            </a:r>
+          </a:p>
+          <a:p>
+            <a:r>
+              <a:t>„Máte fotku šest tisíc krát čtyři tisíce pixelů, to je zhruba dvacet čtyři megapixelů, a máte ji poslat e-mailem. Napište si konkrétní číslo — kolik pixelů podle vás na přílohu stačí — a podle čeho jste to určili. Dvě minuty.“</a:t>
+            </a:r>
+          </a:p>
+          <a:p>
+            <a:r>
+              <a:t>Potom: „Ve dvojici. Kdo napsal menší číslo? Ten ať vysvětlí, proč mu to stačí.“</a:t>
+            </a:r>
+          </a:p>
+          <a:p/>
+          <a:p>
+            <a:r>
+              <a:t>CO DĚLÁŠ</a:t>
+            </a:r>
+          </a:p>
+          <a:p>
+            <a:r>
+              <a:t>Sbírej čísla, která uslyšíš, a tři z nich napiš na tabuli. Na konci hodiny se k nim vrátíš a třída rozhodne, které bylo odhadnuté nejlíp.</a:t>
+            </a:r>
+          </a:p>
+          <a:p>
+            <a:r>
+              <a:t>Skoro vždy padne „zmenším to na polovinu“. To je pořád dvanáct megapixelů a nikam to nevede — ale teď to neopravuj.</a:t>
+            </a:r>
+          </a:p>
+          <a:p/>
+          <a:p>
+            <a:r>
+              <a:t>POZOR</a:t>
+            </a:r>
+          </a:p>
+          <a:p>
+            <a:r>
+              <a:t>Ptej se na pixely, ne na megabajty. Velikost souboru je až důsledek komprese a ta přijde příští hodinu.</a:t>
             </a:r>
           </a:p>
         </p:txBody>
@@ -668,22 +745,60 @@
           <a:lstStyle/>
           <a:p>
             <a:r>
-              <a:t>Čas: 5–12 minut.</a:t>
-            </a:r>
-          </a:p>
-          <a:p>
-            <a:r>
-              <a:t>Klíčové pojmy: Rozlišení · Barevná hloubka · DPI a velikost</a:t>
-            </a:r>
-          </a:p>
-          <a:p>
-            <a:r>
-              <a:t>Více pixelů neznamená automaticky lepší obrázek — znamená větší soubor.</a:t>
-            </a:r>
-          </a:p>
-          <a:p>
-            <a:r>
-              <a:t>Postup: vysvětli stručně, ověř porozuměním otázkou, nepřednášej déle než 7 minut.</a:t>
+              <a:t>Čas: 5–12 minut. Sedm minut je strop.</a:t>
+            </a:r>
+          </a:p>
+          <a:p/>
+          <a:p>
+            <a:r>
+              <a:t>CO ŘEKNEŠ</a:t>
+            </a:r>
+          </a:p>
+          <a:p>
+            <a:r>
+              <a:t>K bodu 01: „Rozlišení je počet pixelů na šířku a na výšku. Nic víc v tom není. Určuje, kolik detailu v obrázku vůbec je.“</a:t>
+            </a:r>
+          </a:p>
+          <a:p>
+            <a:r>
+              <a:t>K bodu 02: „Barevná hloubka říká, kolik bitů připadá na jeden pixel. Osm bitů znamená dvě stě padesát šest barev, čtyřiadvacet bitů přes šestnáct milionů. Když barvy dojdou, nejbližší odstín se zaokrouhlí — a to uvidíte na vlastní oči.“</a:t>
+            </a:r>
+          </a:p>
+          <a:p>
+            <a:r>
+              <a:t>K bodu 03: „A teď to, co plete skoro každého. DPI na obrazovce neznamená nic. Obrázek 1920 na 1080 je stejný, ať má v hlavičce napsáno 72 nebo 300 DPI. DPI začne platit, teprve když se tiskne — říká, na kolik centimetrů se ty pixely rozprostřou.“</a:t>
+            </a:r>
+          </a:p>
+          <a:p>
+            <a:r>
+              <a:t>Závěr: „Víc pixelů automaticky neznamená lepší obrázek. Znamená větší soubor.“</a:t>
+            </a:r>
+          </a:p>
+          <a:p/>
+          <a:p>
+            <a:r>
+              <a:t>CO DĚLÁŠ</a:t>
+            </a:r>
+          </a:p>
+          <a:p>
+            <a:r>
+              <a:t>Napiš na tabuli 24 bit = 16 777 216 barev · 8 bit = 256 · 4 bit = 16 · 1 bit = 2. Budou to potřebovat do tabulky.</a:t>
+            </a:r>
+          </a:p>
+          <a:p>
+            <a:r>
+              <a:t>Ověř porozumění: „Fotku 1000 × 1000 přepnu ze 72 na 300 DPI. Kolik má teď pixelů?“ Správně pořád milion. Kdo řekne „víc“, potřebuje bod 03 znovu.</a:t>
+            </a:r>
+          </a:p>
+          <a:p/>
+          <a:p>
+            <a:r>
+              <a:t>POZOR</a:t>
+            </a:r>
+          </a:p>
+          <a:p>
+            <a:r>
+              <a:t>Nemluv o formátech a kompresi. To je celá hodina 3 a tady by to jen zamlžilo rozdíl mezi rozlišením a hloubkou.</a:t>
             </a:r>
           </a:p>
         </p:txBody>
@@ -756,29 +871,85 @@
               <a:t>Čas: 12–40 minut.</a:t>
             </a:r>
           </a:p>
-          <a:p>
-            <a:r>
-              <a:t>Soubory: Laboratoř – barevná hloubka.html, Obrázky/hloubka_*.png</a:t>
-            </a:r>
-          </a:p>
-          <a:p>
-            <a:r>
-              <a:t>12–22 min – modul 04, pozor na to, že pásy jsou nejlépe vidět na obloze a na slunci.</a:t>
-            </a:r>
-          </a:p>
-          <a:p>
-            <a:r>
-              <a:t>22–32 min – tři návrhy nastavení.</a:t>
-            </a:r>
-          </a:p>
-          <a:p>
-            <a:r>
-              <a:t>32–40 min – porovnání; upozorni, že 8 bitů u fotografie s přechody nestačí, u plošné grafiky ano.</a:t>
-            </a:r>
-          </a:p>
-          <a:p>
-            <a:r>
-              <a:t>Výstup: Tabulka čtyř barevných hloubek s pozorováním a tři návrhy nastavení se zdůvodněním.</a:t>
+          <a:p/>
+          <a:p>
+            <a:r>
+              <a:t>CO ŘEKNEŠ</a:t>
+            </a:r>
+          </a:p>
+          <a:p>
+            <a:r>
+              <a:t>„Otevřete laboratoř, modul 04. Přepínejte hloubku od čtyřiadvaceti bitů dolů a hledejte okamžik, kdy se obloha přestane měnit plynule a rozpadne se do pruhů. Ten okamžik si zapište.“</a:t>
+            </a:r>
+          </a:p>
+          <a:p/>
+          <a:p>
+            <a:r>
+              <a:t>12–22 MIN · MODUL 04</a:t>
+            </a:r>
+          </a:p>
+          <a:p>
+            <a:r>
+              <a:t>Pásy jsou nejlíp vidět na obloze a kolem slunce, ne v trávě. Když je student nevidí, pošli ho očima do místa s plynulým přechodem.</a:t>
+            </a:r>
+          </a:p>
+          <a:p>
+            <a:r>
+              <a:t>Obcházej a ptej se: „U kolika bitů se ti to zlomilo?“ Většina třídy najde zlom mezi 8 a 4 bity.</a:t>
+            </a:r>
+          </a:p>
+          <a:p>
+            <a:r>
+              <a:t>Do tabulky patří u každé hloubky počet barev, velikost souboru a co se pokazilo. Skutečné velikosti: 24 bit 290 kB, 8 bit 123 kB, 4 bit 72 kB, 1 bit 1,8 kB.</a:t>
+            </a:r>
+          </a:p>
+          <a:p/>
+          <a:p>
+            <a:r>
+              <a:t>22–32 MIN · TŘI NÁVRHY NASTAVENÍ</a:t>
+            </a:r>
+          </a:p>
+          <a:p>
+            <a:r>
+              <a:t>Web, tisk A4, ikona. Trvej na tom, že u každého je napsaný účel, ne jen čísla.</a:t>
+            </a:r>
+          </a:p>
+          <a:p>
+            <a:r>
+              <a:t>Rozumné odpovědi: web zhruba 1600 px na delší straně a 24 bit · tisk A4 kolem 2500 × 3500 px a 24 bit · ikona 64 × 64 px, kde stačí málo barev.</a:t>
+            </a:r>
+          </a:p>
+          <a:p/>
+          <a:p>
+            <a:r>
+              <a:t>32–40 MIN · POROVNÁNÍ</a:t>
+            </a:r>
+          </a:p>
+          <a:p>
+            <a:r>
+              <a:t>Klíčová věta hodiny: osm bitů nestačí fotografii s přechody, ale plošné grafice stačí bohatě. Ukaž to na tom, že logo v 8 bitech vypadá pořád stejně, zatímco obloha ne.</a:t>
+            </a:r>
+          </a:p>
+          <a:p/>
+          <a:p>
+            <a:r>
+              <a:t>VÝSTUP</a:t>
+            </a:r>
+          </a:p>
+          <a:p>
+            <a:r>
+              <a:t>Tabulka čtyř barevných hloubek s pozorováním a tři návrhy nastavení se zdůvodněním.</a:t>
+            </a:r>
+          </a:p>
+          <a:p/>
+          <a:p>
+            <a:r>
+              <a:t>KDYŽ NENÍ ČAS</a:t>
+            </a:r>
+          </a:p>
+          <a:p>
+            <a:r>
+              <a:t>Škrtni třetí návrh (ikonu). Je z těch tří nejmíň nosný a k plošné grafice se stejně vrátíš v hodině 5.</a:t>
             </a:r>
           </a:p>
         </p:txBody>
@@ -848,27 +1019,40 @@
           <a:lstStyle/>
           <a:p>
             <a:r>
-              <a:t>Průběžná kontrola. Projdi body nahlas, studenti si odškrtávají v sešitu.</a:t>
-            </a:r>
-          </a:p>
-          <a:p>
-            <a:r>
-              <a:t>• Umíš říct rozdíl mezi rozlišením a barevnou hloubkou.</a:t>
-            </a:r>
-          </a:p>
-          <a:p>
-            <a:r>
-              <a:t>• Máš zapsáno, u které hloubky se objevily pásy v obloze.</a:t>
-            </a:r>
-          </a:p>
-          <a:p>
-            <a:r>
-              <a:t>• U tří návrhů máš uvedený účel, ne jen čísla.</a:t>
-            </a:r>
-          </a:p>
-          <a:p>
-            <a:r>
-              <a:t>• Víš, kdy má smysl mluvit o DPI a kdy ne.</a:t>
+              <a:t>Průběžná kontrola, zhruba 38. minuta.</a:t>
+            </a:r>
+          </a:p>
+          <a:p/>
+          <a:p>
+            <a:r>
+              <a:t>CO ŘEKNEŠ</a:t>
+            </a:r>
+          </a:p>
+          <a:p>
+            <a:r>
+              <a:t>„Než odevzdáte, projedeme čtyři věci. Odškrtávejte si je.“ Čti body nahlas a mezi nimi nech pauzu.</a:t>
+            </a:r>
+          </a:p>
+          <a:p/>
+          <a:p>
+            <a:r>
+              <a:t>CO DĚLÁŠ</a:t>
+            </a:r>
+          </a:p>
+          <a:p>
+            <a:r>
+              <a:t>Bod o DPI je ten, na kterém se pozná, jestli hodina zabrala. Když se u něj třída zadrhne, věnuj mu první minuty rozboru na dalším snímku.</a:t>
+            </a:r>
+          </a:p>
+          <a:p/>
+          <a:p>
+            <a:r>
+              <a:t>POZOR</a:t>
+            </a:r>
+          </a:p>
+          <a:p>
+            <a:r>
+              <a:t>Není to známkování, je to poslední šance práci dodělat.</a:t>
             </a:r>
           </a:p>
         </p:txBody>
@@ -938,27 +1122,60 @@
           <a:lstStyle/>
           <a:p>
             <a:r>
-              <a:t>Společný rozbor – očekávané závěry:</a:t>
-            </a:r>
-          </a:p>
-          <a:p>
-            <a:r>
-              <a:t>Rozlišení: Počet pixelů. Zmenšit lze vždy, zvětšit bez ztráty ne.</a:t>
-            </a:r>
-          </a:p>
-          <a:p>
-            <a:r>
-              <a:t>Barevná hloubka: Určuje počet dostupných barev. Málo barev se projeví pásy v plynulých přechodech.</a:t>
-            </a:r>
-          </a:p>
-          <a:p>
-            <a:r>
-              <a:t>Podle obsahu: Plošná grafika snese málo barev. Fotografie s oblohou potřebuje plnou hloubku.</a:t>
-            </a:r>
-          </a:p>
-          <a:p>
-            <a:r>
-              <a:t>DPI: Údaj pro tisk. Pro obrazovku je rozhodující rozměr v pixelech.</a:t>
+              <a:t>Společný rozbor, 40–43 minut.</a:t>
+            </a:r>
+          </a:p>
+          <a:p/>
+          <a:p>
+            <a:r>
+              <a:t>CO ŘEKNEŠ</a:t>
+            </a:r>
+          </a:p>
+          <a:p>
+            <a:r>
+              <a:t>Vrať se k číslům na tabuli: „Na začátku jste odhadovali, kolik pixelů stačí na e-mail. Které z těch tří čísel bylo nejblíž a proč?“</a:t>
+            </a:r>
+          </a:p>
+          <a:p>
+            <a:r>
+              <a:t>Rozumný závěr je zhruba 1600 až 2000 px na delší straně. Ať k němu dojde třída, ne ty.</a:t>
+            </a:r>
+          </a:p>
+          <a:p>
+            <a:r>
+              <a:t>Pak nech studenty vyslovit čtyři závěry ze snímku a doplň jen to, co nezazní.</a:t>
+            </a:r>
+          </a:p>
+          <a:p/>
+          <a:p>
+            <a:r>
+              <a:t>OČEKÁVANÉ ZÁVĚRY</a:t>
+            </a:r>
+          </a:p>
+          <a:p>
+            <a:r>
+              <a:t>Rozlišení: počet pixelů. Zmenšit lze vždy, zvětšit bez ztráty ne.</a:t>
+            </a:r>
+          </a:p>
+          <a:p>
+            <a:r>
+              <a:t>Barevná hloubka: určuje počet dostupných barev. Málo barev se projeví pásy v plynulých přechodech.</a:t>
+            </a:r>
+          </a:p>
+          <a:p>
+            <a:r>
+              <a:t>Podle obsahu: plošná grafika snese málo barev, fotografie s oblohou potřebuje plnou hloubku.</a:t>
+            </a:r>
+          </a:p>
+          <a:p>
+            <a:r>
+              <a:t>DPI: údaj pro tisk. Pro obrazovku rozhoduje rozměr v pixelech.</a:t>
+            </a:r>
+          </a:p>
+          <a:p/>
+          <a:p>
+            <a:r>
+              <a:t>POZOR</a:t>
             </a:r>
           </a:p>
           <a:p>
@@ -1033,17 +1250,45 @@
           <a:lstStyle/>
           <a:p>
             <a:r>
-              <a:t>Exit ticket: Proč se u fotografie oblohy objeví pásy dřív než u obrázku loga?</a:t>
-            </a:r>
-          </a:p>
-          <a:p>
-            <a:r>
-              <a:t>Sbírej individuálně. Slouží jako doklad o učení každého studenta.</a:t>
-            </a:r>
-          </a:p>
-          <a:p>
-            <a:r>
-              <a:t>Očekávaná odpověď: Obloha obsahuje plynulý přechod mnoha odstínů; při málo barvách se přechod zaokrouhlí do viditelných pásů.</a:t>
+              <a:t>Exit ticket, poslední dvě minuty.</a:t>
+            </a:r>
+          </a:p>
+          <a:p/>
+          <a:p>
+            <a:r>
+              <a:t>CO ŘEKNEŠ</a:t>
+            </a:r>
+          </a:p>
+          <a:p>
+            <a:r>
+              <a:t>„Každý sám, jedna dvě věty. Proč se u fotografie oblohy objeví pásy dřív než u obrázku loga?“</a:t>
+            </a:r>
+          </a:p>
+          <a:p/>
+          <a:p>
+            <a:r>
+              <a:t>CO DĚLÁŠ</a:t>
+            </a:r>
+          </a:p>
+          <a:p>
+            <a:r>
+              <a:t>Sbírej u dveří. Je to doklad o učení každého jednotlivce — v tabulce se dvojice kryjí, tady ne.</a:t>
+            </a:r>
+          </a:p>
+          <a:p/>
+          <a:p>
+            <a:r>
+              <a:t>OČEKÁVANÁ ODPOVĚĎ</a:t>
+            </a:r>
+          </a:p>
+          <a:p>
+            <a:r>
+              <a:t>Obloha je plynulý přechod mnoha odstínů. Při málo barvách se sousední odstíny zaokrouhlí na tentýž a přechod se rozpadne do viditelných pásů. Logo má několik plných barev, takže mu zaokrouhlení nevadí.</a:t>
+            </a:r>
+          </a:p>
+          <a:p>
+            <a:r>
+              <a:t>Uznej i odpověď postavenou na počtu barev v obrázku bez slova „zaokrouhlení“ — myšlenka je táž.</a:t>
             </a:r>
           </a:p>
         </p:txBody>

--- a/public/materialy/1L/6/Prezentace k hodinám/2. Rozlišení, barvy a barevná hloubka.pptx
+++ b/public/materialy/1L/6/Prezentace k hodinám/2. Rozlišení, barvy a barevná hloubka.pptx
@@ -518,7 +518,7 @@
           </a:p>
           <a:p>
             <a:r>
-              <a:t>Rozbal Obrázky.zip. Čtyři soubory hloubka_1bit až hloubka_24bit musí mít každý student u sebe — na plátně se pásy v obloze často nepoznají a studenti se musí dívat na svůj monitor.</a:t>
+              <a:t>Rozbal Obrázky.zip a rozdej Barevná hloubka.csv. Čtyři soubory hloubka_1bit až hloubka_24bit musí mít každý student u sebe — na plátně se pásy v obloze často nepoznají a studenti se musí dívat na svůj monitor.</a:t>
             </a:r>
           </a:p>
           <a:p/>
@@ -551,7 +551,7 @@
           </a:p>
           <a:p>
             <a:r>
-              <a:t>Tabulka čtyř barevných hloubek s pozorováním a tři návrhy nastavení se zdůvodněním.</a:t>
+              <a:t>Vyplněné Barevná hloubka.csv a tři návrhy nastavení se zdůvodněním.</a:t>
             </a:r>
           </a:p>
           <a:p/>
@@ -900,7 +900,7 @@
           </a:p>
           <a:p>
             <a:r>
-              <a:t>Do tabulky patří u každé hloubky počet barev, velikost souboru a co se pokazilo. Skutečné velikosti: 24 bit 290 kB, 8 bit 123 kB, 4 bit 72 kB, 1 bit 1,8 kB.</a:t>
+              <a:t>Počet barev i velikosti jsou v Barevná hloubka.csv předvyplněné. Student doplňuje jen dva sloupce: co se pokazilo a kde by ta hloubka stačila. Pro kontrolu: 24 bit 290 kB, 8 bit 123 kB, 4 bit 72 kB, 1 bit 1,8 kB.</a:t>
             </a:r>
           </a:p>
           <a:p/>
@@ -938,7 +938,7 @@
           </a:p>
           <a:p>
             <a:r>
-              <a:t>Tabulka čtyř barevných hloubek s pozorováním a tři návrhy nastavení se zdůvodněním.</a:t>
+              <a:t>Vyplněné Barevná hloubka.csv a tři návrhy nastavení se zdůvodněním.</a:t>
             </a:r>
           </a:p>
           <a:p/>
@@ -6281,7 +6281,7 @@
                 </a:solidFill>
                 <a:latin typeface="Calibri"/>
               </a:rPr>
-              <a:t>Laboratoř – barevná hloubka.html, Obrázky/hloubka_*.png</a:t>
+              <a:t>Laboratoř – barevná hloubka.html, Barevná hloubka.csv, Obrázky/hloubka_*.png</a:t>
             </a:r>
           </a:p>
         </p:txBody>
@@ -6460,7 +6460,7 @@
                 </a:solidFill>
                 <a:latin typeface="Calibri"/>
               </a:rPr>
-              <a:t>Zapiš pozorování</a:t>
+              <a:t>Doplň CSV</a:t>
             </a:r>
           </a:p>
         </p:txBody>
@@ -6499,7 +6499,7 @@
                 </a:solidFill>
                 <a:latin typeface="Calibri"/>
               </a:rPr>
-              <a:t>U každé hloubky napiš počet barev, velikost a co se pokazilo.</a:t>
+              <a:t>U každé hloubky doplň do Barevná hloubka.csv, co se pokazilo a kde by stačila.</a:t>
             </a:r>
           </a:p>
         </p:txBody>
@@ -6722,7 +6722,7 @@
                 </a:solidFill>
                 <a:latin typeface="Calibri"/>
               </a:rPr>
-              <a:t>Tabulka čtyř barevných hloubek s pozorováním a tři návrhy nastavení se zdůvodněním.</a:t>
+              <a:t>Vyplněné Barevná hloubka.csv a tři návrhy nastavení se zdůvodněním.</a:t>
             </a:r>
           </a:p>
         </p:txBody>

--- a/public/materialy/1L/6/Prezentace k hodinám/2. Rozlišení, barvy a barevná hloubka.pptx
+++ b/public/materialy/1L/6/Prezentace k hodinám/2. Rozlišení, barvy a barevná hloubka.pptx
@@ -513,12 +513,12 @@
           </a:p>
           <a:p>
             <a:r>
-              <a:t>Otevři Laboratoř – barevná hloubka.html na projektoru a měj nalistovaný modul 04.</a:t>
-            </a:r>
-          </a:p>
-          <a:p>
-            <a:r>
-              <a:t>Rozbal Obrázky.zip a rozdej Barevná hloubka.csv. Čtyři soubory hloubka_1bit až hloubka_24bit musí mít každý student u sebe — na plátně se pásy v obloze často nepoznají a studenti se musí dívat na svůj monitor.</a:t>
+              <a:t>Otevři Laboratoř – barevná hloubka.html na projektoru a měj nalistovaný modul 04.</a:t>
+            </a:r>
+          </a:p>
+          <a:p>
+            <a:r>
+              <a:t>Rozbal Obrázky.zip a rozdej Barevná hloubka.csv. Čtyři soubory hloubka_1bit až hloubka_24bit musí mít každý student u sebe — na plátně se pásy v obloze často nepoznají a studenti se musí dívat na svůj monitor.</a:t>
             </a:r>
           </a:p>
           <a:p/>
@@ -529,7 +529,7 @@
           </a:p>
           <a:p>
             <a:r>
-              <a:t>Hodinu 1: rastr má pevný počet pixelů. Dnes se ptáme, kolik jich stačí a kolik barev k tomu.</a:t>
+              <a:t>Hodinu 1: rastr má pevný počet pixelů. Dnes se ptáme, kolik jich stačí a kolik barev k tomu.</a:t>
             </a:r>
           </a:p>
           <a:p/>
@@ -540,7 +540,7 @@
           </a:p>
           <a:p>
             <a:r>
-              <a:t>Student vysvětlí, co určuje rozlišení a barevná hloubka, a odhadne, jaké nastavení stačí pro daný účel.</a:t>
+              <a:t>Student vysvětlí, co určuje rozlišení a barevná hloubka, a odhadne, jaké nastavení stačí pro daný účel.</a:t>
             </a:r>
           </a:p>
           <a:p/>
@@ -551,7 +551,7 @@
           </a:p>
           <a:p>
             <a:r>
-              <a:t>Vyplněné Barevná hloubka.csv a tři návrhy nastavení se zdůvodněním.</a:t>
+              <a:t>Vyplněné Barevná hloubka.csv a tři návrhy nastavení se zdůvodněním.</a:t>
             </a:r>
           </a:p>
           <a:p/>
@@ -562,7 +562,7 @@
           </a:p>
           <a:p>
             <a:r>
-              <a:t>5 min odhad · 7 min výklad · 28 min práce · 5 min rozbor a exit ticket.</a:t>
+              <a:t>5 min odhad · 7 min výklad · 28 min práce · 5 min rozbor a exit ticket.</a:t>
             </a:r>
           </a:p>
         </p:txBody>
@@ -643,7 +643,7 @@
           </a:p>
           <a:p>
             <a:r>
-              <a:t>„Máte fotku šest tisíc krát čtyři tisíce pixelů, to je zhruba dvacet čtyři megapixelů, a máte ji poslat e-mailem. Napište si konkrétní číslo — kolik pixelů podle vás na přílohu stačí — a podle čeho jste to určili. Dvě minuty.“</a:t>
+              <a:t>„Máte fotku šest tisíc krát čtyři tisíce pixelů, to je zhruba dvacet čtyři megapixelů, a máte ji poslat e-mailem. Napište si konkrétní číslo — kolik pixelů podle vás na přílohu stačí — a podle čeho jste to určili. Dvě minuty.“</a:t>
             </a:r>
           </a:p>
           <a:p>
@@ -659,12 +659,12 @@
           </a:p>
           <a:p>
             <a:r>
-              <a:t>Sbírej čísla, která uslyšíš, a tři z nich napiš na tabuli. Na konci hodiny se k nim vrátíš a třída rozhodne, které bylo odhadnuté nejlíp.</a:t>
-            </a:r>
-          </a:p>
-          <a:p>
-            <a:r>
-              <a:t>Skoro vždy padne „zmenším to na polovinu“. To je pořád dvanáct megapixelů a nikam to nevede — ale teď to neopravuj.</a:t>
+              <a:t>Sbírej čísla, která uslyšíš, a tři z nich napiš na tabuli. Na konci hodiny se k nim vrátíš a třída rozhodne, které bylo odhadnuté nejlíp.</a:t>
+            </a:r>
+          </a:p>
+          <a:p>
+            <a:r>
+              <a:t>Skoro vždy padne „zmenším to na polovinu“. To je pořád dvanáct megapixelů a nikam to nevede — ale teď to neopravuj.</a:t>
             </a:r>
           </a:p>
           <a:p/>
@@ -675,7 +675,7 @@
           </a:p>
           <a:p>
             <a:r>
-              <a:t>Ptej se na pixely, ne na megabajty. Velikost souboru je až důsledek komprese a ta přijde příští hodinu.</a:t>
+              <a:t>Ptej se na pixely, ne na megabajty. Velikost souboru je až důsledek komprese a ta přijde příští hodinu.</a:t>
             </a:r>
           </a:p>
         </p:txBody>
@@ -756,17 +756,17 @@
           </a:p>
           <a:p>
             <a:r>
-              <a:t>K bodu 01: „Rozlišení je počet pixelů na šířku a na výšku. Nic víc v tom není. Určuje, kolik detailu v obrázku vůbec je.“</a:t>
-            </a:r>
-          </a:p>
-          <a:p>
-            <a:r>
-              <a:t>K bodu 02: „Barevná hloubka říká, kolik bitů připadá na jeden pixel. Osm bitů znamená dvě stě padesát šest barev, čtyřiadvacet bitů přes šestnáct milionů. Když barvy dojdou, nejbližší odstín se zaokrouhlí — a to uvidíte na vlastní oči.“</a:t>
-            </a:r>
-          </a:p>
-          <a:p>
-            <a:r>
-              <a:t>K bodu 03: „A teď to, co plete skoro každého. DPI na obrazovce neznamená nic. Obrázek 1920 na 1080 je stejný, ať má v hlavičce napsáno 72 nebo 300 DPI. DPI začne platit, teprve když se tiskne — říká, na kolik centimetrů se ty pixely rozprostřou.“</a:t>
+              <a:t>K bodu 01: „Rozlišení je počet pixelů na šířku a na výšku. Nic víc v tom není. Určuje, kolik detailu v obrázku vůbec je.“</a:t>
+            </a:r>
+          </a:p>
+          <a:p>
+            <a:r>
+              <a:t>K bodu 02: „Barevná hloubka říká, kolik bitů připadá na jeden pixel. Osm bitů znamená dvě stě padesát šest barev, čtyřiadvacet bitů přes šestnáct milionů. Když barvy dojdou, nejbližší odstín se zaokrouhlí — a to uvidíte na vlastní oči.“</a:t>
+            </a:r>
+          </a:p>
+          <a:p>
+            <a:r>
+              <a:t>K bodu 03: „A teď to, co plete skoro každého. DPI na obrazovce neznamená nic. Obrázek 1920 na 1080 je stejný, ať má v hlavičce napsáno 72 nebo 300 DPI. DPI začne platit, teprve když se tiskne — říká, na kolik centimetrů se ty pixely rozprostřou.“</a:t>
             </a:r>
           </a:p>
           <a:p>
@@ -798,7 +798,7 @@
           </a:p>
           <a:p>
             <a:r>
-              <a:t>Nemluv o formátech a kompresi. To je celá hodina 3 a tady by to jen zamlžilo rozdíl mezi rozlišením a hloubkou.</a:t>
+              <a:t>Nemluv o formátech a kompresi. To je celá hodina 3 a tady by to jen zamlžilo rozdíl mezi rozlišením a hloubkou.</a:t>
             </a:r>
           </a:p>
         </p:txBody>
@@ -879,7 +879,7 @@
           </a:p>
           <a:p>
             <a:r>
-              <a:t>„Otevřete laboratoř, modul 04. Přepínejte hloubku od čtyřiadvaceti bitů dolů a hledejte okamžik, kdy se obloha přestane měnit plynule a rozpadne se do pruhů. Ten okamžik si zapište.“</a:t>
+              <a:t>„Otevřete laboratoř, modul 04. Přepínejte hloubku od čtyřiadvaceti bitů dolů a hledejte okamžik, kdy se obloha přestane měnit plynule a rozpadne se do pruhů. Ten okamžik si zapište.“</a:t>
             </a:r>
           </a:p>
           <a:p/>
@@ -890,17 +890,17 @@
           </a:p>
           <a:p>
             <a:r>
-              <a:t>Pásy jsou nejlíp vidět na obloze a kolem slunce, ne v trávě. Když je student nevidí, pošli ho očima do místa s plynulým přechodem.</a:t>
-            </a:r>
-          </a:p>
-          <a:p>
-            <a:r>
-              <a:t>Obcházej a ptej se: „U kolika bitů se ti to zlomilo?“ Většina třídy najde zlom mezi 8 a 4 bity.</a:t>
-            </a:r>
-          </a:p>
-          <a:p>
-            <a:r>
-              <a:t>Počet barev i velikosti jsou v Barevná hloubka.csv předvyplněné. Student doplňuje jen dva sloupce: co se pokazilo a kde by ta hloubka stačila. Pro kontrolu: 24 bit 290 kB, 8 bit 123 kB, 4 bit 72 kB, 1 bit 1,8 kB.</a:t>
+              <a:t>Pásy jsou nejlíp vidět na obloze a kolem slunce, ne v trávě. Když je student nevidí, pošli ho očima do místa s plynulým přechodem.</a:t>
+            </a:r>
+          </a:p>
+          <a:p>
+            <a:r>
+              <a:t>Obcházej a ptej se: „U kolika bitů se ti to zlomilo?“ Většina třídy najde zlom mezi 8 a 4 bity.</a:t>
+            </a:r>
+          </a:p>
+          <a:p>
+            <a:r>
+              <a:t>Počet barev i velikosti jsou v Barevná hloubka.csv předvyplněné. Student doplňuje jen dva sloupce: co se pokazilo a kde by ta hloubka stačila. Pro kontrolu: 24 bit 290 kB, 8 bit 123 kB, 4 bit 72 kB, 1 bit 1,8 kB.</a:t>
             </a:r>
           </a:p>
           <a:p/>
@@ -911,12 +911,12 @@
           </a:p>
           <a:p>
             <a:r>
-              <a:t>Web, tisk A4, ikona. Trvej na tom, že u každého je napsaný účel, ne jen čísla.</a:t>
-            </a:r>
-          </a:p>
-          <a:p>
-            <a:r>
-              <a:t>Rozumné odpovědi: web zhruba 1600 px na delší straně a 24 bit · tisk A4 kolem 2500 × 3500 px a 24 bit · ikona 64 × 64 px, kde stačí málo barev.</a:t>
+              <a:t>Web, tisk A4, ikona. Trvej na tom, že u každého je napsaný účel, ne jen čísla.</a:t>
+            </a:r>
+          </a:p>
+          <a:p>
+            <a:r>
+              <a:t>Rozumné odpovědi: web zhruba 1600 px na delší straně a 24 bit · tisk A4 kolem 2500 × 3500 px a 24 bit · ikona 64 × 64 px, kde stačí málo barev.</a:t>
             </a:r>
           </a:p>
           <a:p/>
@@ -927,7 +927,7 @@
           </a:p>
           <a:p>
             <a:r>
-              <a:t>Klíčová věta hodiny: osm bitů nestačí fotografii s přechody, ale plošné grafice stačí bohatě. Ukaž to na tom, že logo v 8 bitech vypadá pořád stejně, zatímco obloha ne.</a:t>
+              <a:t>Klíčová věta hodiny: osm bitů nestačí fotografii s přechody, ale plošné grafice stačí bohatě. Ukaž to na tom, že logo v 8 bitech vypadá pořád stejně, zatímco obloha ne.</a:t>
             </a:r>
           </a:p>
           <a:p/>
@@ -938,7 +938,7 @@
           </a:p>
           <a:p>
             <a:r>
-              <a:t>Vyplněné Barevná hloubka.csv a tři návrhy nastavení se zdůvodněním.</a:t>
+              <a:t>Vyplněné Barevná hloubka.csv a tři návrhy nastavení se zdůvodněním.</a:t>
             </a:r>
           </a:p>
           <a:p/>
@@ -949,7 +949,7 @@
           </a:p>
           <a:p>
             <a:r>
-              <a:t>Škrtni třetí návrh (ikonu). Je z těch tří nejmíň nosný a k plošné grafice se stejně vrátíš v hodině 5.</a:t>
+              <a:t>Škrtni třetí návrh (ikonu). Je z těch tří nejmíň nosný a k plošné grafice se stejně vrátíš v hodině 5.</a:t>
             </a:r>
           </a:p>
         </p:txBody>
@@ -1030,7 +1030,7 @@
           </a:p>
           <a:p>
             <a:r>
-              <a:t>„Než odevzdáte, projedeme čtyři věci. Odškrtávejte si je.“ Čti body nahlas a mezi nimi nech pauzu.</a:t>
+              <a:t>„Než odevzdáte, projedeme čtyři věci. Odškrtávejte si je.“ Čti body nahlas a mezi nimi nech pauzu.</a:t>
             </a:r>
           </a:p>
           <a:p/>
@@ -1041,7 +1041,7 @@
           </a:p>
           <a:p>
             <a:r>
-              <a:t>Bod o DPI je ten, na kterém se pozná, jestli hodina zabrala. Když se u něj třída zadrhne, věnuj mu první minuty rozboru na dalším snímku.</a:t>
+              <a:t>Bod o DPI je ten, na kterém se pozná, jestli hodina zabrala. Když se u něj třída zadrhne, věnuj mu první minuty rozboru na dalším snímku.</a:t>
             </a:r>
           </a:p>
           <a:p/>
@@ -1133,17 +1133,17 @@
           </a:p>
           <a:p>
             <a:r>
-              <a:t>Vrať se k číslům na tabuli: „Na začátku jste odhadovali, kolik pixelů stačí na e-mail. Které z těch tří čísel bylo nejblíž a proč?“</a:t>
-            </a:r>
-          </a:p>
-          <a:p>
-            <a:r>
-              <a:t>Rozumný závěr je zhruba 1600 až 2000 px na delší straně. Ať k němu dojde třída, ne ty.</a:t>
-            </a:r>
-          </a:p>
-          <a:p>
-            <a:r>
-              <a:t>Pak nech studenty vyslovit čtyři závěry ze snímku a doplň jen to, co nezazní.</a:t>
+              <a:t>Vrať se k číslům na tabuli: „Na začátku jste odhadovali, kolik pixelů stačí na e-mail. Které z těch tří čísel bylo nejblíž a proč?“</a:t>
+            </a:r>
+          </a:p>
+          <a:p>
+            <a:r>
+              <a:t>Rozumný závěr je zhruba 1600 až 2000 px na delší straně. Ať k němu dojde třída, ne ty.</a:t>
+            </a:r>
+          </a:p>
+          <a:p>
+            <a:r>
+              <a:t>Pak nech studenty vyslovit čtyři závěry ze snímku a doplň jen to, co nezazní.</a:t>
             </a:r>
           </a:p>
           <a:p/>
@@ -1159,17 +1159,17 @@
           </a:p>
           <a:p>
             <a:r>
-              <a:t>Barevná hloubka: určuje počet dostupných barev. Málo barev se projeví pásy v plynulých přechodech.</a:t>
-            </a:r>
-          </a:p>
-          <a:p>
-            <a:r>
-              <a:t>Podle obsahu: plošná grafika snese málo barev, fotografie s oblohou potřebuje plnou hloubku.</a:t>
-            </a:r>
-          </a:p>
-          <a:p>
-            <a:r>
-              <a:t>DPI: údaj pro tisk. Pro obrazovku rozhoduje rozměr v pixelech.</a:t>
+              <a:t>Barevná hloubka: určuje počet dostupných barev. Málo barev se projeví pásy v plynulých přechodech.</a:t>
+            </a:r>
+          </a:p>
+          <a:p>
+            <a:r>
+              <a:t>Podle obsahu: plošná grafika snese málo barev, fotografie s oblohou potřebuje plnou hloubku.</a:t>
+            </a:r>
+          </a:p>
+          <a:p>
+            <a:r>
+              <a:t>DPI: údaj pro tisk. Pro obrazovku rozhoduje rozměr v pixelech.</a:t>
             </a:r>
           </a:p>
           <a:p/>
@@ -1180,7 +1180,7 @@
           </a:p>
           <a:p>
             <a:r>
-              <a:t>Hodnoť postup a zdůvodnění, ne shodu s jednou formulací.</a:t>
+              <a:t>Hodnoť postup a zdůvodnění, ne shodu s jednou formulací.</a:t>
             </a:r>
           </a:p>
         </p:txBody>
@@ -1261,7 +1261,7 @@
           </a:p>
           <a:p>
             <a:r>
-              <a:t>„Každý sám, jedna dvě věty. Proč se u fotografie oblohy objeví pásy dřív než u obrázku loga?“</a:t>
+              <a:t>„Každý sám, jedna dvě věty. Proč se u fotografie oblohy objeví pásy dřív než u obrázku loga?“</a:t>
             </a:r>
           </a:p>
           <a:p/>
@@ -1272,7 +1272,7 @@
           </a:p>
           <a:p>
             <a:r>
-              <a:t>Sbírej u dveří. Je to doklad o učení každého jednotlivce — v tabulce se dvojice kryjí, tady ne.</a:t>
+              <a:t>Sbírej u dveří. Je to doklad o učení každého jednotlivce — v tabulce se dvojice kryjí, tady ne.</a:t>
             </a:r>
           </a:p>
           <a:p/>
@@ -1283,12 +1283,12 @@
           </a:p>
           <a:p>
             <a:r>
-              <a:t>Obloha je plynulý přechod mnoha odstínů. Při málo barvách se sousední odstíny zaokrouhlí na tentýž a přechod se rozpadne do viditelných pásů. Logo má několik plných barev, takže mu zaokrouhlení nevadí.</a:t>
-            </a:r>
-          </a:p>
-          <a:p>
-            <a:r>
-              <a:t>Uznej i odpověď postavenou na počtu barev v obrázku bez slova „zaokrouhlení“ — myšlenka je táž.</a:t>
+              <a:t>Obloha je plynulý přechod mnoha odstínů. Při málo barvách se sousední odstíny zaokrouhlí na tentýž a přechod se rozpadne do viditelných pásů. Logo má několik plných barev, takže mu zaokrouhlení nevadí.</a:t>
+            </a:r>
+          </a:p>
+          <a:p>
+            <a:r>
+              <a:t>Uznej i odpověď postavenou na počtu barev v obrázku bez slova „zaokrouhlení“ — myšlenka je táž.</a:t>
             </a:r>
           </a:p>
         </p:txBody>
@@ -4486,7 +4486,7 @@
                 </a:solidFill>
                 <a:latin typeface="Calibri"/>
               </a:rPr>
-              <a:t>Rozlišení, barvy a barevná hloubka</a:t>
+              <a:t>Rozlišení, barvy a barevná hloubka</a:t>
             </a:r>
           </a:p>
         </p:txBody>
@@ -4525,7 +4525,7 @@
                 </a:solidFill>
                 <a:latin typeface="Calibri"/>
               </a:rPr>
-              <a:t>Student vysvětlí, co určuje rozlišení a barevná hloubka, a odhadne, jaké nastavení stačí pro daný účel.</a:t>
+              <a:t>Student vysvětlí, co určuje rozlišení a barevná hloubka, a odhadne, jaké nastavení stačí pro daný účel.</a:t>
             </a:r>
           </a:p>
         </p:txBody>
@@ -4850,7 +4850,7 @@
                 </a:solidFill>
                 <a:latin typeface="Calibri"/>
               </a:rPr>
-              <a:t>POČÍTAČOVÁ GRAFIKA A PRÁCE S MULTIMÉDII</a:t>
+              <a:t>POČÍTAČOVÁ GRAFIKA A PRÁCE S MULTIMÉDII</a:t>
             </a:r>
           </a:p>
         </p:txBody>
@@ -4924,7 +4924,7 @@
                 </a:solidFill>
                 <a:latin typeface="Calibri"/>
               </a:rPr>
-              <a:t>Fotku 6 000 × 4 000 px máš poslat e‑mailem. Co s ní uděláš, aby prošla a přitom byla použitelná?</a:t>
+              <a:t>Fotku 6 000 × 4 000 px máš poslat e‑mailem. Co s ní uděláš, aby prošla a přitom byla použitelná?</a:t>
             </a:r>
           </a:p>
         </p:txBody>
@@ -5146,7 +5146,7 @@
                 </a:solidFill>
                 <a:latin typeface="Calibri"/>
               </a:rPr>
-              <a:t>Kdo ve dvojici uvedl menší číslo a proč?</a:t>
+              <a:t>Kdo ve dvojici uvedl menší číslo a proč?</a:t>
             </a:r>
           </a:p>
         </p:txBody>
@@ -5392,7 +5392,7 @@
                 </a:solidFill>
                 <a:latin typeface="Calibri"/>
               </a:rPr>
-              <a:t>POČÍTAČOVÁ GRAFIKA A PRÁCE S MULTIMÉDII</a:t>
+              <a:t>POČÍTAČOVÁ GRAFIKA A PRÁCE S MULTIMÉDII</a:t>
             </a:r>
           </a:p>
         </p:txBody>
@@ -5580,7 +5580,7 @@
                 </a:solidFill>
                 <a:latin typeface="Calibri"/>
               </a:rPr>
-              <a:t>Počet pixelů na šířku a výšku. Určuje, kolik detailu je v obrázku uloženo.</a:t>
+              <a:t>Počet pixelů na šířku a výšku. Určuje, kolik detailu je v obrázku uloženo.</a:t>
             </a:r>
           </a:p>
         </p:txBody>
@@ -5847,7 +5847,7 @@
                 </a:solidFill>
                 <a:latin typeface="Calibri"/>
               </a:rPr>
-              <a:t>DPI a velikost</a:t>
+              <a:t>DPI a velikost</a:t>
             </a:r>
           </a:p>
         </p:txBody>
@@ -6176,7 +6176,7 @@
                 </a:solidFill>
                 <a:latin typeface="Calibri"/>
               </a:rPr>
-              <a:t>POČÍTAČOVÁ GRAFIKA A PRÁCE S MULTIMÉDII</a:t>
+              <a:t>POČÍTAČOVÁ GRAFIKA A PRÁCE S MULTIMÉDII</a:t>
             </a:r>
           </a:p>
         </p:txBody>
@@ -6390,7 +6390,7 @@
                 </a:solidFill>
                 <a:latin typeface="Calibri"/>
               </a:rPr>
-              <a:t>Přepínej 24, 8, 4 a 1 bit. Najdi, kde se poprvé objeví pásy v obloze.</a:t>
+              <a:t>Přepínej 24, 8, 4 a 1 bit. Najdi, kde se poprvé objeví pásy v obloze.</a:t>
             </a:r>
           </a:p>
         </p:txBody>
@@ -6499,7 +6499,7 @@
                 </a:solidFill>
                 <a:latin typeface="Calibri"/>
               </a:rPr>
-              <a:t>U každé hloubky doplň do Barevná hloubka.csv, co se pokazilo a kde by stačila.</a:t>
+              <a:t>U každé hloubky doplň do Barevná hloubka.csv, co se pokazilo a kde by stačila.</a:t>
             </a:r>
           </a:p>
         </p:txBody>
@@ -6608,7 +6608,7 @@
                 </a:solidFill>
                 <a:latin typeface="Calibri"/>
               </a:rPr>
-              <a:t>Urči rozlišení a hloubku pro web, tisk A4 a ikonu.</a:t>
+              <a:t>Urči rozlišení a hloubku pro web, tisk A4 a ikonu.</a:t>
             </a:r>
           </a:p>
         </p:txBody>
@@ -6722,7 +6722,7 @@
                 </a:solidFill>
                 <a:latin typeface="Calibri"/>
               </a:rPr>
-              <a:t>Vyplněné Barevná hloubka.csv a tři návrhy nastavení se zdůvodněním.</a:t>
+              <a:t>Vyplněné Barevná hloubka.csv a tři návrhy nastavení se zdůvodněním.</a:t>
             </a:r>
           </a:p>
         </p:txBody>
@@ -6933,7 +6933,7 @@
                 </a:solidFill>
                 <a:latin typeface="Calibri"/>
               </a:rPr>
-              <a:t>POČÍTAČOVÁ GRAFIKA A PRÁCE S MULTIMÉDII</a:t>
+              <a:t>POČÍTAČOVÁ GRAFIKA A PRÁCE S MULTIMÉDII</a:t>
             </a:r>
           </a:p>
         </p:txBody>
@@ -7042,7 +7042,7 @@
                 </a:solidFill>
                 <a:latin typeface="Calibri"/>
               </a:rPr>
-              <a:t>Umíš říct rozdíl mezi rozlišením a barevnou hloubkou.</a:t>
+              <a:t>Umíš říct rozdíl mezi rozlišením a barevnou hloubkou.</a:t>
             </a:r>
           </a:p>
         </p:txBody>
@@ -7116,7 +7116,7 @@
                 </a:solidFill>
                 <a:latin typeface="Calibri"/>
               </a:rPr>
-              <a:t>Máš zapsáno, u které hloubky se objevily pásy v obloze.</a:t>
+              <a:t>Máš zapsáno, u které hloubky se objevily pásy v obloze.</a:t>
             </a:r>
           </a:p>
         </p:txBody>
@@ -7190,7 +7190,7 @@
                 </a:solidFill>
                 <a:latin typeface="Calibri"/>
               </a:rPr>
-              <a:t>U tří návrhů máš uvedený účel, ne jen čísla.</a:t>
+              <a:t>U tří návrhů máš uvedený účel, ne jen čísla.</a:t>
             </a:r>
           </a:p>
         </p:txBody>
@@ -7264,7 +7264,7 @@
                 </a:solidFill>
                 <a:latin typeface="Calibri"/>
               </a:rPr>
-              <a:t>Víš, kdy má smysl mluvit o DPI a kdy ne.</a:t>
+              <a:t>Víš, kdy má smysl mluvit o DPI a kdy ne.</a:t>
             </a:r>
           </a:p>
         </p:txBody>
@@ -7396,7 +7396,7 @@
                 </a:solidFill>
                 <a:latin typeface="Calibri"/>
               </a:rPr>
-              <a:t>Co si z hodiny odnést</a:t>
+              <a:t>Co si z hodiny odnést</a:t>
             </a:r>
           </a:p>
         </p:txBody>
@@ -7475,7 +7475,7 @@
                 </a:solidFill>
                 <a:latin typeface="Calibri"/>
               </a:rPr>
-              <a:t>POČÍTAČOVÁ GRAFIKA A PRÁCE S MULTIMÉDII</a:t>
+              <a:t>POČÍTAČOVÁ GRAFIKA A PRÁCE S MULTIMÉDII</a:t>
             </a:r>
           </a:p>
         </p:txBody>
@@ -7702,7 +7702,7 @@
                 </a:solidFill>
                 <a:latin typeface="Calibri"/>
               </a:rPr>
-              <a:t>Určuje počet dostupných barev. Málo barev se projeví pásy v plynulých přechodech.</a:t>
+              <a:t>Určuje počet dostupných barev. Málo barev se projeví pásy v plynulých přechodech.</a:t>
             </a:r>
           </a:p>
         </p:txBody>
@@ -7820,7 +7820,7 @@
                 </a:solidFill>
                 <a:latin typeface="Calibri"/>
               </a:rPr>
-              <a:t>Plošná grafika snese málo barev. Fotografie s oblohou potřebuje plnou hloubku.</a:t>
+              <a:t>Plošná grafika snese málo barev. Fotografie s oblohou potřebuje plnou hloubku.</a:t>
             </a:r>
           </a:p>
         </p:txBody>
@@ -7938,7 +7938,7 @@
                 </a:solidFill>
                 <a:latin typeface="Calibri"/>
               </a:rPr>
-              <a:t>Údaj pro tisk. Pro obrazovku je rozhodující rozměr v pixelech.</a:t>
+              <a:t>Údaj pro tisk. Pro obrazovku je rozhodující rozměr v pixelech.</a:t>
             </a:r>
           </a:p>
         </p:txBody>
@@ -8079,7 +8079,7 @@
                 </a:solidFill>
                 <a:latin typeface="Calibri"/>
               </a:rPr>
-              <a:t>POČÍTAČOVÁ GRAFIKA A PRÁCE S MULTIMÉDII</a:t>
+              <a:t>POČÍTAČOVÁ GRAFIKA A PRÁCE S MULTIMÉDII</a:t>
             </a:r>
           </a:p>
         </p:txBody>
@@ -8188,7 +8188,7 @@
                 </a:solidFill>
                 <a:latin typeface="Calibri"/>
               </a:rPr>
-              <a:t>Proč se u fotografie oblohy objeví pásy dřív než u obrázku loga?</a:t>
+              <a:t>Proč se u fotografie oblohy objeví pásy dřív než u obrázku loga?</a:t>
             </a:r>
           </a:p>
         </p:txBody>
